--- a/public/materialy/1L/7/Prezentace k hodinám/9. Soukromí, GDPR a autorská práva.pptx
+++ b/public/materialy/1L/7/Prezentace k hodinám/9. Soukromí, GDPR a autorská práva.pptx
@@ -548,7 +548,7 @@
           </a:p>
           <a:p xmlns:a="http://schemas.openxmlformats.org/drawingml/2006/main">
             <a:r>
-              <a:t>Soubory: 09_dila_a_licence.csv, digitální pracovní sešit</a:t>
+              <a:t>Soubory: 9. Díla a licence.csv, digitální pracovní sešit</a:t>
             </a:r>
           </a:p>
           <a:p xmlns:a="http://schemas.openxmlformats.org/drawingml/2006/main">
@@ -808,7 +808,7 @@
           <a:lstStyle xmlns:a="http://schemas.openxmlformats.org/drawingml/2006/main"/>
           <a:p xmlns:a="http://schemas.openxmlformats.org/drawingml/2006/main">
             <a:r>
-              <a:t>Hlavní aktivita využívá: 09_dila_a_licence.csv, digitální pracovní sešit</a:t>
+              <a:t>Hlavní aktivita využívá: 9. Díla a licence.csv, digitální pracovní sešit</a:t>
             </a:r>
           </a:p>
           <a:p xmlns:a="http://schemas.openxmlformats.org/drawingml/2006/main">
@@ -3674,7 +3674,7 @@
               </a:defRPr>
             </a:pPr>
             <a:r>
-              <a:t>09_dila_a_licence.csv, digitální pracovní sešit</a:t>
+              <a:t>9. Díla a licence.csv, digitální pracovní sešit</a:t>
             </a:r>
           </a:p>
         </p:txBody>

--- a/public/materialy/1L/7/Prezentace k hodinám/9. Soukromí, GDPR a autorská práva.pptx
+++ b/public/materialy/1L/7/Prezentace k hodinám/9. Soukromí, GDPR a autorská práva.pptx
@@ -558,7 +558,7 @@
           </a:p>
           <a:p xmlns:a="http://schemas.openxmlformats.org/drawingml/2006/main">
             <a:r>
-              <a:t>Před otevřením dalšího snímku stručně uveďte téma a nechte studenty připravit pracovní soubory.</a:t>
+              <a:t>Před otevřením dalšího snímku stručně uveď téma a nech studenty připravit pracovní soubory.</a:t>
             </a:r>
           </a:p>
         </p:txBody>
@@ -638,7 +638,7 @@
           </a:p>
           <a:p xmlns:a="http://schemas.openxmlformats.org/drawingml/2006/main">
             <a:r>
-              <a:t>Postup učitele: Třiďte běžné příklady a ptejte se, zda lze určit konkrétní osobu.</a:t>
+              <a:t>Postup učitele: Třiď běžné příklady a ptej se, zda lze určit konkrétní osobu.</a:t>
             </a:r>
           </a:p>
           <a:p xmlns:a="http://schemas.openxmlformats.org/drawingml/2006/main">
@@ -648,7 +648,7 @@
           </a:p>
           <a:p xmlns:a="http://schemas.openxmlformats.org/drawingml/2006/main">
             <a:r>
-              <a:t>Neprozrazujte správnou odpověď. Cílem je zachytit počáteční úsudek, ke kterému se třída vrátí při reflexi.</a:t>
+              <a:t>Neprozrazuj správnou odpověď. Cílem je zachytit počáteční úsudek, ke kterému se třída vrátí při reflexi.</a:t>
             </a:r>
           </a:p>
         </p:txBody>
@@ -728,7 +728,7 @@
           </a:p>
           <a:p xmlns:a="http://schemas.openxmlformats.org/drawingml/2006/main">
             <a:r>
-              <a:t>Postup učitele: Požadujte účel, nezbytnost, rozsah a zabezpečení.</a:t>
+              <a:t>Postup učitele: Požaduj účel, nezbytnost, rozsah a zabezpečení.</a:t>
             </a:r>
           </a:p>
           <a:p xmlns:a="http://schemas.openxmlformats.org/drawingml/2006/main">
@@ -738,7 +738,7 @@
           </a:p>
           <a:p xmlns:a="http://schemas.openxmlformats.org/drawingml/2006/main">
             <a:r>
-              <a:t>Nechte studenty doplnit příklad ke každému bodu. Přechod k aktivitě proveďte otázkou: Jak tyto tři body použijeme na dnešní soubor?</a:t>
+              <a:t>Nech studenty doplnit příklad ke každému bodu. Přechod k aktivitě proveď otázkou: Jak tyto tři body použijeme na dnešní soubor?</a:t>
             </a:r>
           </a:p>
         </p:txBody>
@@ -813,17 +813,17 @@
           </a:p>
           <a:p xmlns:a="http://schemas.openxmlformats.org/drawingml/2006/main">
             <a:r>
-              <a:t>17–24 min – Mýtus o souhlasu: Vysvětlete, že souhlas není jediný právní základ a nemusí být vždy vhodný.</a:t>
-            </a:r>
-          </a:p>
-          <a:p xmlns:a="http://schemas.openxmlformats.org/drawingml/2006/main">
-            <a:r>
-              <a:t>24–36 min – Licence a použití děl v CSV: Rozlište nalezení obrázku, licenci, citaci a souhlas osob na fotografii.</a:t>
-            </a:r>
-          </a:p>
-          <a:p xmlns:a="http://schemas.openxmlformats.org/drawingml/2006/main">
-            <a:r>
-              <a:t>36–42 min – Modelové uvedení díla: Použijte vzorec autor – název – zdroj – licence.</a:t>
+              <a:t>17–24 min – Mýtus o souhlasu: Vysvětli, že souhlas není jediný právní základ a nemusí být vždy vhodný.</a:t>
+            </a:r>
+          </a:p>
+          <a:p xmlns:a="http://schemas.openxmlformats.org/drawingml/2006/main">
+            <a:r>
+              <a:t>24–36 min – Licence a použití děl v CSV: Rozliš nalezení obrázku, licenci, citaci a souhlas osob na fotografii.</a:t>
+            </a:r>
+          </a:p>
+          <a:p xmlns:a="http://schemas.openxmlformats.org/drawingml/2006/main">
+            <a:r>
+              <a:t>36–42 min – Modelové uvedení díla: Použij vzorec autor – název – zdroj – licence.</a:t>
             </a:r>
           </a:p>
           <a:p xmlns:a="http://schemas.openxmlformats.org/drawingml/2006/main">
@@ -833,7 +833,7 @@
           </a:p>
           <a:p xmlns:a="http://schemas.openxmlformats.org/drawingml/2006/main">
             <a:r>
-              <a:t>Během práce nepřebírejte myš za studenta. Pomáhejte otázkami z dalšího snímku a žádejte, aby každé rozhodnutí opřel o konkrétní znak nebo zdroj.</a:t>
+              <a:t>Během práce nepřebírej myš za studenta. Pomáhej otázkami z dalšího snímku a žádej, aby každé rozhodnutí opřel o konkrétní znak nebo zdroj.</a:t>
             </a:r>
           </a:p>
         </p:txBody>
@@ -913,7 +913,7 @@
           </a:p>
           <a:p xmlns:a="http://schemas.openxmlformats.org/drawingml/2006/main">
             <a:r>
-              <a:t>Podpora: Použijte čtyři kontrolní otázky: Kdo? Co? Proč? Za jakých podmínek?</a:t>
+              <a:t>Podpora: Použij čtyři kontrolní otázky: Kdo? Co? Proč? Za jakých podmínek?</a:t>
             </a:r>
           </a:p>
           <a:p xmlns:a="http://schemas.openxmlformats.org/drawingml/2006/main">
@@ -923,7 +923,7 @@
           </a:p>
           <a:p xmlns:a="http://schemas.openxmlformats.org/drawingml/2006/main">
             <a:r>
-              <a:t>Pro rychlou mezikontrolu nechte dvojice vyměnit výstup a označit jeden dobře doložený bod a jednu otázku, která ještě zůstává.</a:t>
+              <a:t>Pro rychlou mezikontrolu nech dvojice vyměnit výstup a označit jeden dobře doložený bod a jednu otázku, která ještě zůstává.</a:t>
             </a:r>
           </a:p>
         </p:txBody>
@@ -998,12 +998,12 @@
           </a:p>
           <a:p xmlns:a="http://schemas.openxmlformats.org/drawingml/2006/main">
             <a:r>
-              <a:t>Časté chyby a intervence: „Na všechno je potřeba souhlas.“ → Ptejte se na účel a právní základ; ve vztahu školy a žáka může být souhlas problematický. | „Když uvedu autora, mohu dílo použít.“ → Uvedení autora nenahrazuje licenci nebo jiné oprávnění. | „Obrázek z internetu je veřejný.“ → Veřejně dostupný neznamená volně použitelný; dohledávejte původ a podmínky.</a:t>
-            </a:r>
-          </a:p>
-          <a:p xmlns:a="http://schemas.openxmlformats.org/drawingml/2006/main">
-            <a:r>
-              <a:t>Nečtěte celý klíč. Vyberte dva studentské postupy, které vedou k odlišným závěrům, a nechte třídu určit, který je lépe podložený.</a:t>
+              <a:t>Časté chyby a intervence: „Na všechno je potřeba souhlas.“ → Ptej se na účel a právní základ; ve vztahu školy a žáka může být souhlas problematický. | „Když uvedu autora, mohu dílo použít.“ → Uvedení autora nenahrazuje licenci nebo jiné oprávnění. | „Obrázek z internetu je veřejný.“ → Veřejně dostupný neznamená volně použitelný; dohledávej původ a podmínky.</a:t>
+            </a:r>
+          </a:p>
+          <a:p xmlns:a="http://schemas.openxmlformats.org/drawingml/2006/main">
+            <a:r>
+              <a:t>Nečti celý klíč. Vyber dva studentské postupy, které vedou k odlišným závěrům, a nech třídu určit, který je lépe podložený.</a:t>
             </a:r>
           </a:p>
         </p:txBody>
@@ -1078,7 +1078,7 @@
           </a:p>
           <a:p xmlns:a="http://schemas.openxmlformats.org/drawingml/2006/main">
             <a:r>
-              <a:t>Podpora: Použijte čtyři kontrolní otázky: Kdo? Co? Proč? Za jakých podmínek?</a:t>
+              <a:t>Podpora: Použij čtyři kontrolní otázky: Kdo? Co? Proč? Za jakých podmínek?</a:t>
             </a:r>
           </a:p>
           <a:p xmlns:a="http://schemas.openxmlformats.org/drawingml/2006/main">
@@ -1093,7 +1093,7 @@
           </a:p>
           <a:p xmlns:a="http://schemas.openxmlformats.org/drawingml/2006/main">
             <a:r>
-              <a:t>Vyberte způsob odevzdání předem. Odpověď použijte jako diagnostiku pro začátek další hodiny; nehodnoťte pouze formální správnost, ale konkrétnost a zdůvodnění.</a:t>
+              <a:t>Vyber způsob odevzdání předem. Odpověď použij jako diagnostiku pro začátek další hodiny; nehodnoť pouze formální správnost, ale konkrétnost a zdůvodnění.</a:t>
             </a:r>
           </a:p>
         </p:txBody>

--- a/public/materialy/1L/7/Prezentace k hodinám/9. Soukromí, GDPR a autorská práva.pptx
+++ b/public/materialy/1L/7/Prezentace k hodinám/9. Soukromí, GDPR a autorská práva.pptx
@@ -543,22 +543,22 @@
           <a:lstStyle xmlns:a="http://schemas.openxmlformats.org/drawingml/2006/main"/>
           <a:p xmlns:a="http://schemas.openxmlformats.org/drawingml/2006/main">
             <a:r>
-              <a:t>Výukový cíl: Student rozpozná osobní údaj, posoudí přiměřenost jeho zpracování a zvolí legální a etický způsob použití cizího díla.</a:t>
-            </a:r>
-          </a:p>
-          <a:p xmlns:a="http://schemas.openxmlformats.org/drawingml/2006/main">
-            <a:r>
-              <a:t>Soubory: 9. Díla a licence.csv, digitální pracovní sešit</a:t>
-            </a:r>
-          </a:p>
-          <a:p xmlns:a="http://schemas.openxmlformats.org/drawingml/2006/main">
-            <a:r>
-              <a:t>Výstup: Rozhodnutí k modelovým údajům a licencím včetně správného uvedení díla.</a:t>
-            </a:r>
-          </a:p>
-          <a:p xmlns:a="http://schemas.openxmlformats.org/drawingml/2006/main">
-            <a:r>
-              <a:t>Před otevřením dalšího snímku stručně uveď téma a nech studenty připravit pracovní soubory.</a:t>
+              <a:t>Výukový cíl: Student rozpozná osobní údaj, posoudí přiměřenost jeho zpracování a zvolí legální a etický způsob použití cizího díla.</a:t>
+            </a:r>
+          </a:p>
+          <a:p xmlns:a="http://schemas.openxmlformats.org/drawingml/2006/main">
+            <a:r>
+              <a:t>Soubory: 9. Díla a licence.csv, digitální pracovní sešit</a:t>
+            </a:r>
+          </a:p>
+          <a:p xmlns:a="http://schemas.openxmlformats.org/drawingml/2006/main">
+            <a:r>
+              <a:t>Výstup: Rozhodnutí k modelovým údajům a licencím včetně správného uvedení díla.</a:t>
+            </a:r>
+          </a:p>
+          <a:p xmlns:a="http://schemas.openxmlformats.org/drawingml/2006/main">
+            <a:r>
+              <a:t>Před otevřením dalšího snímku stručně uveď téma a nech studenty připravit pracovní soubory.</a:t>
             </a:r>
           </a:p>
         </p:txBody>
@@ -638,7 +638,7 @@
           </a:p>
           <a:p xmlns:a="http://schemas.openxmlformats.org/drawingml/2006/main">
             <a:r>
-              <a:t>Postup učitele: Třiď běžné příklady a ptej se, zda lze určit konkrétní osobu.</a:t>
+              <a:t>Postup učitele: Třiď běžné příklady a ptej se, zda lze určit konkrétní osobu.</a:t>
             </a:r>
           </a:p>
           <a:p xmlns:a="http://schemas.openxmlformats.org/drawingml/2006/main">
@@ -728,17 +728,17 @@
           </a:p>
           <a:p xmlns:a="http://schemas.openxmlformats.org/drawingml/2006/main">
             <a:r>
-              <a:t>Postup učitele: Požaduj účel, nezbytnost, rozsah a zabezpečení.</a:t>
-            </a:r>
-          </a:p>
-          <a:p xmlns:a="http://schemas.openxmlformats.org/drawingml/2006/main">
-            <a:r>
-              <a:t>Klíčové závěry: Osobní údaje: Jméno, datum narození, školní e-mail, rozpoznatelná fotografie a poloha se vztahují k identifikované či identifikovatelné osobě. | Anonymní souhrn: Obvykle není osobním údajem, pokud osobu nelze rozumně zpětně určit. | Kódované výsledky: Mohou zůstat osobními údaji, pokud existuje klíč nebo jiná reálná možnost zpětného přiřazení.</a:t>
-            </a:r>
-          </a:p>
-          <a:p xmlns:a="http://schemas.openxmlformats.org/drawingml/2006/main">
-            <a:r>
-              <a:t>Nech studenty doplnit příklad ke každému bodu. Přechod k aktivitě proveď otázkou: Jak tyto tři body použijeme na dnešní soubor?</a:t>
+              <a:t>Postup učitele: Požaduj účel, nezbytnost, rozsah a zabezpečení.</a:t>
+            </a:r>
+          </a:p>
+          <a:p xmlns:a="http://schemas.openxmlformats.org/drawingml/2006/main">
+            <a:r>
+              <a:t>Klíčové závěry: Osobní údaje: Jméno, datum narození, školní e-mail, rozpoznatelná fotografie a poloha se vztahují k identifikované či identifikovatelné osobě. | Anonymní souhrn: Obvykle není osobním údajem, pokud osobu nelze rozumně zpětně určit. | Kódované výsledky: Mohou zůstat osobními údaji, pokud existuje klíč nebo jiná reálná možnost zpětného přiřazení.</a:t>
+            </a:r>
+          </a:p>
+          <a:p xmlns:a="http://schemas.openxmlformats.org/drawingml/2006/main">
+            <a:r>
+              <a:t>Nech studenty doplnit příklad ke každému bodu. Přechod k aktivitě proveď otázkou: Jak tyto tři body použijeme na dnešní soubor?</a:t>
             </a:r>
           </a:p>
         </p:txBody>
@@ -808,17 +808,17 @@
           <a:lstStyle xmlns:a="http://schemas.openxmlformats.org/drawingml/2006/main"/>
           <a:p xmlns:a="http://schemas.openxmlformats.org/drawingml/2006/main">
             <a:r>
-              <a:t>Hlavní aktivita využívá: 9. Díla a licence.csv, digitální pracovní sešit</a:t>
-            </a:r>
-          </a:p>
-          <a:p xmlns:a="http://schemas.openxmlformats.org/drawingml/2006/main">
-            <a:r>
-              <a:t>17–24 min – Mýtus o souhlasu: Vysvětli, že souhlas není jediný právní základ a nemusí být vždy vhodný.</a:t>
-            </a:r>
-          </a:p>
-          <a:p xmlns:a="http://schemas.openxmlformats.org/drawingml/2006/main">
-            <a:r>
-              <a:t>24–36 min – Licence a použití děl v CSV: Rozliš nalezení obrázku, licenci, citaci a souhlas osob na fotografii.</a:t>
+              <a:t>Hlavní aktivita využívá: 9. Díla a licence.csv, digitální pracovní sešit</a:t>
+            </a:r>
+          </a:p>
+          <a:p xmlns:a="http://schemas.openxmlformats.org/drawingml/2006/main">
+            <a:r>
+              <a:t>17–24 min – Mýtus o souhlasu: Vysvětli, že souhlas není jediný právní základ a nemusí být vždy vhodný.</a:t>
+            </a:r>
+          </a:p>
+          <a:p xmlns:a="http://schemas.openxmlformats.org/drawingml/2006/main">
+            <a:r>
+              <a:t>24–36 min – Licence a použití děl v CSV: Rozliš nalezení obrázku, licenci, citaci a souhlas osob na fotografii.</a:t>
             </a:r>
           </a:p>
           <a:p xmlns:a="http://schemas.openxmlformats.org/drawingml/2006/main">
@@ -828,12 +828,12 @@
           </a:p>
           <a:p xmlns:a="http://schemas.openxmlformats.org/drawingml/2006/main">
             <a:r>
-              <a:t>Požadovaný výstup: Rozhodnutí k modelovým údajům a licencím včetně správného uvedení díla.</a:t>
-            </a:r>
-          </a:p>
-          <a:p xmlns:a="http://schemas.openxmlformats.org/drawingml/2006/main">
-            <a:r>
-              <a:t>Během práce nepřebírej myš za studenta. Pomáhej otázkami z dalšího snímku a žádej, aby každé rozhodnutí opřel o konkrétní znak nebo zdroj.</a:t>
+              <a:t>Požadovaný výstup: Rozhodnutí k modelovým údajům a licencím včetně správného uvedení díla.</a:t>
+            </a:r>
+          </a:p>
+          <a:p xmlns:a="http://schemas.openxmlformats.org/drawingml/2006/main">
+            <a:r>
+              <a:t>Během práce nepřebírej myš za studenta. Pomáhej otázkami z dalšího snímku a žádej, aby každé rozhodnutí opřel o konkrétní znak nebo zdroj.</a:t>
             </a:r>
           </a:p>
         </p:txBody>
@@ -903,12 +903,12 @@
           <a:lstStyle xmlns:a="http://schemas.openxmlformats.org/drawingml/2006/main"/>
           <a:p xmlns:a="http://schemas.openxmlformats.org/drawingml/2006/main">
             <a:r>
-              <a:t>Kritérium úspěchu: Student odliší osobní údaj od anonymního údaje a u díla uvede původ, oprávnění a podmínky použití.</a:t>
-            </a:r>
-          </a:p>
-          <a:p xmlns:a="http://schemas.openxmlformats.org/drawingml/2006/main">
-            <a:r>
-              <a:t>Vodicí otázky: Lze údaj spojit s konkrétní osobou přímo nebo kombinací s jinými údaji? | Je rozsah údajů nezbytný pro uvedený účel? | Kde je uvedeno oprávnění dílo použít a jaké má podmínky?</a:t>
+              <a:t>Kritérium úspěchu: Student odliší osobní údaj od anonymního údaje a u díla uvede původ, oprávnění a podmínky použití.</a:t>
+            </a:r>
+          </a:p>
+          <a:p xmlns:a="http://schemas.openxmlformats.org/drawingml/2006/main">
+            <a:r>
+              <a:t>Vodicí otázky: Lze údaj spojit s konkrétní osobou přímo nebo kombinací s jinými údaji? | Je rozsah údajů nezbytný pro uvedený účel? | Kde je uvedeno oprávnění dílo použít a jaké má podmínky?</a:t>
             </a:r>
           </a:p>
           <a:p xmlns:a="http://schemas.openxmlformats.org/drawingml/2006/main">
@@ -918,12 +918,12 @@
           </a:p>
           <a:p xmlns:a="http://schemas.openxmlformats.org/drawingml/2006/main">
             <a:r>
-              <a:t>Rozšíření: Student porovná CC0, CC BY a běžné autorské dílo z hlediska povinností uživatele.</a:t>
-            </a:r>
-          </a:p>
-          <a:p xmlns:a="http://schemas.openxmlformats.org/drawingml/2006/main">
-            <a:r>
-              <a:t>Pro rychlou mezikontrolu nech dvojice vyměnit výstup a označit jeden dobře doložený bod a jednu otázku, která ještě zůstává.</a:t>
+              <a:t>Rozšíření: Student porovná CC0, CC BY a běžné autorské dílo z hlediska povinností uživatele.</a:t>
+            </a:r>
+          </a:p>
+          <a:p xmlns:a="http://schemas.openxmlformats.org/drawingml/2006/main">
+            <a:r>
+              <a:t>Pro rychlou mezikontrolu nech dvojice vyměnit výstup a označit jeden dobře doložený bod a jednu otázku, která ještě zůstává.</a:t>
             </a:r>
           </a:p>
         </p:txBody>
@@ -993,17 +993,17 @@
           <a:lstStyle xmlns:a="http://schemas.openxmlformats.org/drawingml/2006/main"/>
           <a:p xmlns:a="http://schemas.openxmlformats.org/drawingml/2006/main">
             <a:r>
-              <a:t>Očekávané závěry: Osobní údaje: Jméno, datum narození, školní e-mail, rozpoznatelná fotografie a poloha se vztahují k identifikované či identifikovatelné osobě. | Anonymní souhrn: Obvykle není osobním údajem, pokud osobu nelze rozumně zpětně určit. | Kódované výsledky: Mohou zůstat osobními údaji, pokud existuje klíč nebo jiná reálná možnost zpětného přiřazení. | Souhlas: Není univerzální odpověď; řeší se také jiný právní základ, účel, transparentnost, minimalizace a zabezpečení. | Vyhledávač: Není zdrojem licence; je nutné otevřít původní stránku a zjistit autora a oprávnění. | CC BY: Při dodržení licence uvést autora, název, zdroj a licenci; zkontrolovat případné úpravy a další podmínky.</a:t>
-            </a:r>
-          </a:p>
-          <a:p xmlns:a="http://schemas.openxmlformats.org/drawingml/2006/main">
-            <a:r>
-              <a:t>Časté chyby a intervence: „Na všechno je potřeba souhlas.“ → Ptej se na účel a právní základ; ve vztahu školy a žáka může být souhlas problematický. | „Když uvedu autora, mohu dílo použít.“ → Uvedení autora nenahrazuje licenci nebo jiné oprávnění. | „Obrázek z internetu je veřejný.“ → Veřejně dostupný neznamená volně použitelný; dohledávej původ a podmínky.</a:t>
-            </a:r>
-          </a:p>
-          <a:p xmlns:a="http://schemas.openxmlformats.org/drawingml/2006/main">
-            <a:r>
-              <a:t>Nečti celý klíč. Vyber dva studentské postupy, které vedou k odlišným závěrům, a nech třídu určit, který je lépe podložený.</a:t>
+              <a:t>Očekávané závěry: Osobní údaje: Jméno, datum narození, školní e-mail, rozpoznatelná fotografie a poloha se vztahují k identifikované či identifikovatelné osobě. | Anonymní souhrn: Obvykle není osobním údajem, pokud osobu nelze rozumně zpětně určit. | Kódované výsledky: Mohou zůstat osobními údaji, pokud existuje klíč nebo jiná reálná možnost zpětného přiřazení. | Souhlas: Není univerzální odpověď; řeší se také jiný právní základ, účel, transparentnost, minimalizace a zabezpečení. | Vyhledávač: Není zdrojem licence; je nutné otevřít původní stránku a zjistit autora a oprávnění. | CC BY: Při dodržení licence uvést autora, název, zdroj a licenci; zkontrolovat případné úpravy a další podmínky.</a:t>
+            </a:r>
+          </a:p>
+          <a:p xmlns:a="http://schemas.openxmlformats.org/drawingml/2006/main">
+            <a:r>
+              <a:t>Časté chyby a intervence: „Na všechno je potřeba souhlas.“ → Ptej se na účel a právní základ; ve vztahu školy a žáka může být souhlas problematický. | „Když uvedu autora, mohu dílo použít.“ → Uvedení autora nenahrazuje licenci nebo jiné oprávnění. | „Obrázek z internetu je veřejný.“ → Veřejně dostupný neznamená volně použitelný; dohledávej původ a podmínky.</a:t>
+            </a:r>
+          </a:p>
+          <a:p xmlns:a="http://schemas.openxmlformats.org/drawingml/2006/main">
+            <a:r>
+              <a:t>Nečti celý klíč. Vyber dva studentské postupy, které vedou k odlišným závěrům, a nech třídu určit, který je lépe podložený.</a:t>
             </a:r>
           </a:p>
         </p:txBody>
@@ -1083,17 +1083,17 @@
           </a:p>
           <a:p xmlns:a="http://schemas.openxmlformats.org/drawingml/2006/main">
             <a:r>
-              <a:t>Rozšíření: Student porovná CC0, CC BY a běžné autorské dílo z hlediska povinností uživatele.</a:t>
-            </a:r>
-          </a:p>
-          <a:p xmlns:a="http://schemas.openxmlformats.org/drawingml/2006/main">
-            <a:r>
-              <a:t>Když technika selže: CSV lze otevřít jako textový soubor; hodnoty jsou oddělené středníkem a stejné situace obsahuje sešit.</a:t>
-            </a:r>
-          </a:p>
-          <a:p xmlns:a="http://schemas.openxmlformats.org/drawingml/2006/main">
-            <a:r>
-              <a:t>Vyber způsob odevzdání předem. Odpověď použij jako diagnostiku pro začátek další hodiny; nehodnoť pouze formální správnost, ale konkrétnost a zdůvodnění.</a:t>
+              <a:t>Rozšíření: Student porovná CC0, CC BY a běžné autorské dílo z hlediska povinností uživatele.</a:t>
+            </a:r>
+          </a:p>
+          <a:p xmlns:a="http://schemas.openxmlformats.org/drawingml/2006/main">
+            <a:r>
+              <a:t>Když technika selže: CSV lze otevřít jako textový soubor; hodnoty jsou oddělené středníkem a stejné situace obsahuje sešit.</a:t>
+            </a:r>
+          </a:p>
+          <a:p xmlns:a="http://schemas.openxmlformats.org/drawingml/2006/main">
+            <a:r>
+              <a:t>Vyber způsob odevzdání předem. Odpověď použij jako diagnostiku pro začátek další hodiny; nehodnoť pouze formální správnost, ale konkrétnost a zdůvodnění.</a:t>
             </a:r>
           </a:p>
         </p:txBody>
@@ -1824,7 +1824,7 @@
             </a:pPr>
             <a:r>
               <a:t>INTERNET, BEZPEČNOST
-A PRÁCE S INFORMACEMI</a:t>
+A PRÁCE S INFORMACEMI</a:t>
             </a:r>
           </a:p>
         </p:txBody>
@@ -1869,7 +1869,7 @@
               </a:defRPr>
             </a:pPr>
             <a:r>
-              <a:t>Soukromí, GDPR a autorská práva</a:t>
+              <a:t>Soukromí, GDPR a autorská práva</a:t>
             </a:r>
           </a:p>
         </p:txBody>
@@ -1914,7 +1914,7 @@
               </a:defRPr>
             </a:pPr>
             <a:r>
-              <a:t>Student rozpozná osobní údaj, posoudí přiměřenost jeho zpracování a zvolí legální a etický způsob použití cizího díla.</a:t>
+              <a:t>Student rozpozná osobní údaj, posoudí přiměřenost jeho zpracování a zvolí legální a etický způsob použití cizího díla.</a:t>
             </a:r>
           </a:p>
         </p:txBody>
@@ -2953,7 +2953,7 @@
               </a:defRPr>
             </a:pPr>
             <a:r>
-              <a:t>Účel a rozsah</a:t>
+              <a:t>Účel a rozsah</a:t>
             </a:r>
           </a:p>
         </p:txBody>
@@ -2998,7 +2998,7 @@
               </a:defRPr>
             </a:pPr>
             <a:r>
-              <a:t>U osobních údajů se ptej, proč jsou potřeba, zda je rozsah nezbytný a jak budou chráněny.</a:t>
+              <a:t>U osobních údajů se ptej, proč jsou potřeba, zda je rozsah nezbytný a jak budou chráněny.</a:t>
             </a:r>
           </a:p>
         </p:txBody>
@@ -3268,7 +3268,7 @@
               </a:defRPr>
             </a:pPr>
             <a:r>
-              <a:t>U díla dohledávej původ a podmínky použití. Zapiš autora, název, zdroj a licenci.</a:t>
+              <a:t>U díla dohledávej původ a podmínky použití. Zapiš autora, název, zdroj a licenci.</a:t>
             </a:r>
           </a:p>
         </p:txBody>
@@ -3344,7 +3344,7 @@
               </a:defRPr>
             </a:pPr>
             <a:r>
-              <a:t>Nejde o rychlý tip. Jde o postup, který lze vysvětlit a zopakovat.</a:t>
+              <a:t>Nejde o rychlý tip. Jde o postup, který lze vysvětlit a zopakovat.</a:t>
             </a:r>
           </a:p>
         </p:txBody>
@@ -3674,7 +3674,7 @@
               </a:defRPr>
             </a:pPr>
             <a:r>
-              <a:t>9. Díla a licence.csv, digitální pracovní sešit</a:t>
+              <a:t>9. Díla a licence.csv, digitální pracovní sešit</a:t>
             </a:r>
           </a:p>
         </p:txBody>
@@ -3840,7 +3840,7 @@
               </a:defRPr>
             </a:pPr>
             <a:r>
-              <a:t>Rozhodni, zda lze určit člověka a zda je rozsah údajů pro účel nezbytný.</a:t>
+              <a:t>Rozhodni, zda lze určit člověka a zda je rozsah údajů pro účel nezbytný.</a:t>
             </a:r>
           </a:p>
         </p:txBody>
@@ -3961,7 +3961,7 @@
               </a:defRPr>
             </a:pPr>
             <a:r>
-              <a:t>Rozhodni o použití díla</a:t>
+              <a:t>Rozhodni o použití díla</a:t>
             </a:r>
           </a:p>
         </p:txBody>
@@ -4006,7 +4006,7 @@
               </a:defRPr>
             </a:pPr>
             <a:r>
-              <a:t>Dohledej původ, licenci, podmínky a případný souhlas osob na fotografii.</a:t>
+              <a:t>Dohledej původ, licenci, podmínky a případný souhlas osob na fotografii.</a:t>
             </a:r>
           </a:p>
         </p:txBody>
@@ -4172,7 +4172,7 @@
               </a:defRPr>
             </a:pPr>
             <a:r>
-              <a:t>Použij vzorec autor – název – zdroj – licence a ověř podmínky úprav.</a:t>
+              <a:t>Použij vzorec autor – název – zdroj – licence a ověř podmínky úprav.</a:t>
             </a:r>
           </a:p>
         </p:txBody>
@@ -4262,7 +4262,7 @@
               </a:defRPr>
             </a:pPr>
             <a:r>
-              <a:t>Rozhodnutí k modelovým údajům a licencím včetně správného uvedení díla.</a:t>
+              <a:t>Rozhodnutí k modelovým údajům a licencím včetně správného uvedení díla.</a:t>
             </a:r>
           </a:p>
         </p:txBody>
@@ -4668,7 +4668,7 @@
               </a:defRPr>
             </a:pPr>
             <a:r>
-              <a:t>Student odliší osobní údaj od anonymního údaje a u díla uvede původ, oprávnění a podmínky použití.</a:t>
+              <a:t>Student odliší osobní údaj od anonymního údaje a u díla uvede původ, oprávnění a podmínky použití.</a:t>
             </a:r>
           </a:p>
         </p:txBody>
@@ -4834,7 +4834,7 @@
               </a:defRPr>
             </a:pPr>
             <a:r>
-              <a:t>Lze údaj spojit s konkrétní osobou přímo nebo kombinací s jinými údaji?</a:t>
+              <a:t>Lze údaj spojit s konkrétní osobou přímo nebo kombinací s jinými údaji?</a:t>
             </a:r>
           </a:p>
         </p:txBody>
@@ -5166,7 +5166,7 @@
               </a:defRPr>
             </a:pPr>
             <a:r>
-              <a:t>Kde je uvedeno oprávnění dílo použít a jaké má podmínky?</a:t>
+              <a:t>Kde je uvedeno oprávnění dílo použít a jaké má podmínky?</a:t>
             </a:r>
           </a:p>
         </p:txBody>
@@ -5541,7 +5541,7 @@
               </a:defRPr>
             </a:pPr>
             <a:r>
-              <a:t>Jméno, datum narození, školní e-mail, rozpoznatelná fotografie a poloha se vztahují k identifikované či identifikovatelné osobě.</a:t>
+              <a:t>Jméno, datum narození, školní e-mail, rozpoznatelná fotografie a poloha se vztahují k identifikované či identifikovatelné osobě.</a:t>
             </a:r>
           </a:p>
         </p:txBody>
@@ -5887,7 +5887,7 @@
               </a:defRPr>
             </a:pPr>
             <a:r>
-              <a:t>Ptejte se na účel a právní základ; ve vztahu školy a žáka může být souhlas problematický.</a:t>
+              <a:t>Ptejte se na účel a právní základ; ve vztahu školy a žáka může být souhlas problematický.</a:t>
             </a:r>
           </a:p>
         </p:txBody>
@@ -5932,7 +5932,7 @@
               </a:defRPr>
             </a:pPr>
             <a:r>
-              <a:t>Vrať se k úvodnímu rozhodnutí. Co bys teď změnil — a proč?</a:t>
+              <a:t>Vrať se k úvodnímu rozhodnutí. Co bys teď změnil — a proč?</a:t>
             </a:r>
           </a:p>
         </p:txBody>
